--- a/folletos/2026-04/pptx/FIP_VANTRUST_LIQUIDEZ_RENDIMIENTO.pptx
+++ b/folletos/2026-04/pptx/FIP_VANTRUST_LIQUIDEZ_RENDIMIENTO.pptx
@@ -2927,7 +2927,7 @@
                 <a:ea typeface="Calibri" pitchFamily="34" charset="-122"/>
                 <a:cs typeface="Calibri" pitchFamily="34" charset="-120"/>
               </a:rPr>
-              <a:t>prueba CLP</a:t>
+              <a:t>prueba 2 CLP</a:t>
             </a:r>
             <a:endParaRPr lang="en-US" sz="800" dirty="0"/>
           </a:p>

--- a/folletos/2026-04/pptx/FIP_VANTRUST_LIQUIDEZ_RENDIMIENTO.pptx
+++ b/folletos/2026-04/pptx/FIP_VANTRUST_LIQUIDEZ_RENDIMIENTO.pptx
@@ -5363,7 +5363,7 @@
                 <a:ea typeface="Calibri" pitchFamily="34" charset="-122"/>
                 <a:cs typeface="Calibri" pitchFamily="34" charset="-120"/>
               </a:rPr>
-              <a:t>prueba CLP</a:t>
+              <a:t>prueba 3 CLP</a:t>
             </a:r>
             <a:endParaRPr lang="en-US" sz="800" dirty="0"/>
           </a:p>

--- a/folletos/2026-04/pptx/FIP_VANTRUST_LIQUIDEZ_RENDIMIENTO.pptx
+++ b/folletos/2026-04/pptx/FIP_VANTRUST_LIQUIDEZ_RENDIMIENTO.pptx
@@ -6323,7 +6323,7 @@
                 <a:ea typeface="Calibri" pitchFamily="34" charset="-122"/>
                 <a:cs typeface="Calibri" pitchFamily="34" charset="-120"/>
               </a:rPr>
-              <a:t>prueba CLP</a:t>
+              <a:t>prueba 4 CLP</a:t>
             </a:r>
             <a:endParaRPr lang="en-US" sz="800" dirty="0"/>
           </a:p>

--- a/folletos/2026-04/pptx/FIP_VANTRUST_LIQUIDEZ_RENDIMIENTO.pptx
+++ b/folletos/2026-04/pptx/FIP_VANTRUST_LIQUIDEZ_RENDIMIENTO.pptx
@@ -6373,7 +6373,7 @@
                 <a:ea typeface="Calibri" pitchFamily="34" charset="-122"/>
                 <a:cs typeface="Calibri" pitchFamily="34" charset="-120"/>
               </a:rPr>
-              <a:t>prueba CLP</a:t>
+              <a:t>prueba 6 CLP</a:t>
             </a:r>
             <a:endParaRPr lang="en-US" sz="800" dirty="0"/>
           </a:p>

--- a/folletos/2026-04/pptx/FIP_VANTRUST_LIQUIDEZ_RENDIMIENTO.pptx
+++ b/folletos/2026-04/pptx/FIP_VANTRUST_LIQUIDEZ_RENDIMIENTO.pptx
@@ -6373,7 +6373,7 @@
                 <a:ea typeface="Calibri" pitchFamily="34" charset="-122"/>
                 <a:cs typeface="Calibri" pitchFamily="34" charset="-120"/>
               </a:rPr>
-              <a:t>prueba 6 CLP</a:t>
+              <a:t>prueba CLP</a:t>
             </a:r>
             <a:endParaRPr lang="en-US" sz="800" dirty="0"/>
           </a:p>
@@ -33352,13 +33352,91 @@
       </p:sp>
       <p:sp>
         <p:nvSpPr>
-          <p:cNvPr id="8" name="Shape 6"/>
+          <p:cNvPr id="8" name="Text 6"/>
           <p:cNvSpPr/>
           <p:nvPr/>
         </p:nvSpPr>
         <p:spPr>
           <a:xfrm>
-            <a:off x="118872" y="1810512"/>
+            <a:off x="118872" y="1719072"/>
+            <a:ext cx="1188720" cy="173736"/>
+          </a:xfrm>
+          <a:prstGeom prst="rect">
+            <a:avLst/>
+          </a:prstGeom>
+          <a:noFill/>
+          <a:ln/>
+        </p:spPr>
+        <p:txBody>
+          <a:bodyPr wrap="square" lIns="0" tIns="0" rIns="0" bIns="0" rtlCol="0" anchor="ctr"/>
+          <a:lstStyle/>
+          <a:p>
+            <a:pPr indent="0" marL="0">
+              <a:buNone/>
+            </a:pPr>
+            <a:r>
+              <a:rPr lang="en-US" sz="750" dirty="0">
+                <a:solidFill>
+                  <a:srgbClr val="000000"/>
+                </a:solidFill>
+                <a:latin typeface="Calibri" pitchFamily="34" charset="0"/>
+                <a:ea typeface="Calibri" pitchFamily="34" charset="-122"/>
+                <a:cs typeface="Calibri" pitchFamily="34" charset="-120"/>
+              </a:rPr>
+              <a:t>CLP</a:t>
+            </a:r>
+            <a:endParaRPr lang="en-US" sz="750" dirty="0"/>
+          </a:p>
+        </p:txBody>
+      </p:sp>
+      <p:sp>
+        <p:nvSpPr>
+          <p:cNvPr id="9" name="Text 7"/>
+          <p:cNvSpPr/>
+          <p:nvPr/>
+        </p:nvSpPr>
+        <p:spPr>
+          <a:xfrm>
+            <a:off x="1307592" y="1719072"/>
+            <a:ext cx="1024128" cy="173736"/>
+          </a:xfrm>
+          <a:prstGeom prst="rect">
+            <a:avLst/>
+          </a:prstGeom>
+          <a:noFill/>
+          <a:ln/>
+        </p:spPr>
+        <p:txBody>
+          <a:bodyPr wrap="square" lIns="0" tIns="0" rIns="0" bIns="0" rtlCol="0" anchor="ctr"/>
+          <a:lstStyle/>
+          <a:p>
+            <a:pPr algn="r" indent="0" marL="0">
+              <a:buNone/>
+            </a:pPr>
+            <a:r>
+              <a:rPr lang="en-US" sz="750" b="1" dirty="0">
+                <a:solidFill>
+                  <a:srgbClr val="000000"/>
+                </a:solidFill>
+                <a:latin typeface="Calibri" pitchFamily="34" charset="0"/>
+                <a:ea typeface="Calibri" pitchFamily="34" charset="-122"/>
+                <a:cs typeface="Calibri" pitchFamily="34" charset="-120"/>
+              </a:rPr>
+              <a:t>100,00%</a:t>
+            </a:r>
+            <a:endParaRPr lang="en-US" sz="750" dirty="0"/>
+          </a:p>
+        </p:txBody>
+      </p:sp>
+      <p:sp>
+        <p:nvSpPr>
+          <p:cNvPr id="10" name="Shape 8"/>
+          <p:cNvSpPr/>
+          <p:nvPr/>
+        </p:nvSpPr>
+        <p:spPr>
+          <a:xfrm>
+            <a:off x="118872" y="2002536"/>
             <a:ext cx="2212848" cy="0"/>
           </a:xfrm>
           <a:prstGeom prst="line">
@@ -33375,13 +33453,13 @@
       </p:sp>
       <p:sp>
         <p:nvSpPr>
-          <p:cNvPr id="9" name="Text 7"/>
+          <p:cNvPr id="11" name="Text 9"/>
           <p:cNvSpPr/>
           <p:nvPr/>
         </p:nvSpPr>
         <p:spPr>
           <a:xfrm>
-            <a:off x="118872" y="1901952"/>
+            <a:off x="118872" y="2093976"/>
             <a:ext cx="2212848" cy="164592"/>
           </a:xfrm>
           <a:prstGeom prst="rect">
@@ -33414,13 +33492,13 @@
       </p:sp>
       <p:sp>
         <p:nvSpPr>
-          <p:cNvPr id="10" name="Shape 8"/>
+          <p:cNvPr id="12" name="Shape 10"/>
           <p:cNvSpPr/>
           <p:nvPr/>
         </p:nvSpPr>
         <p:spPr>
           <a:xfrm>
-            <a:off x="118872" y="2084832"/>
+            <a:off x="118872" y="2276856"/>
             <a:ext cx="2212848" cy="0"/>
           </a:xfrm>
           <a:prstGeom prst="line">
@@ -33437,13 +33515,13 @@
       </p:sp>
       <p:sp>
         <p:nvSpPr>
-          <p:cNvPr id="11" name="Text 9"/>
+          <p:cNvPr id="13" name="Text 11"/>
           <p:cNvSpPr/>
           <p:nvPr/>
         </p:nvSpPr>
         <p:spPr>
           <a:xfrm>
-            <a:off x="118872" y="2157984"/>
+            <a:off x="118872" y="2350008"/>
             <a:ext cx="1371600" cy="164592"/>
           </a:xfrm>
           <a:prstGeom prst="rect">
@@ -33476,13 +33554,13 @@
       </p:sp>
       <p:sp>
         <p:nvSpPr>
-          <p:cNvPr id="12" name="Text 10"/>
+          <p:cNvPr id="14" name="Text 12"/>
           <p:cNvSpPr/>
           <p:nvPr/>
         </p:nvSpPr>
         <p:spPr>
           <a:xfrm>
-            <a:off x="1490472" y="2157984"/>
+            <a:off x="1490472" y="2350008"/>
             <a:ext cx="841248" cy="164592"/>
           </a:xfrm>
           <a:prstGeom prst="rect">
@@ -33507,7 +33585,7 @@
                 <a:ea typeface="Calibri" pitchFamily="34" charset="-122"/>
                 <a:cs typeface="Calibri" pitchFamily="34" charset="-120"/>
               </a:rPr>
-              <a:t>100,00%</a:t>
+              <a:t>66,20%</a:t>
             </a:r>
             <a:endParaRPr lang="en-US" sz="700" dirty="0"/>
           </a:p>
@@ -33515,13 +33593,169 @@
       </p:sp>
       <p:sp>
         <p:nvSpPr>
-          <p:cNvPr id="13" name="Shape 11"/>
+          <p:cNvPr id="15" name="Text 13"/>
           <p:cNvSpPr/>
           <p:nvPr/>
         </p:nvSpPr>
         <p:spPr>
           <a:xfrm>
-            <a:off x="118872" y="2423160"/>
+            <a:off x="118872" y="2523744"/>
+            <a:ext cx="1371600" cy="164592"/>
+          </a:xfrm>
+          <a:prstGeom prst="rect">
+            <a:avLst/>
+          </a:prstGeom>
+          <a:noFill/>
+          <a:ln/>
+        </p:spPr>
+        <p:txBody>
+          <a:bodyPr wrap="square" lIns="0" tIns="0" rIns="0" bIns="0" rtlCol="0" anchor="ctr"/>
+          <a:lstStyle/>
+          <a:p>
+            <a:pPr indent="0" marL="0">
+              <a:buNone/>
+            </a:pPr>
+            <a:r>
+              <a:rPr lang="en-US" sz="700" dirty="0">
+                <a:solidFill>
+                  <a:srgbClr val="000000"/>
+                </a:solidFill>
+                <a:latin typeface="Calibri" pitchFamily="34" charset="0"/>
+                <a:ea typeface="Calibri" pitchFamily="34" charset="-122"/>
+                <a:cs typeface="Calibri" pitchFamily="34" charset="-120"/>
+              </a:rPr>
+              <a:t>Inmob</a:t>
+            </a:r>
+            <a:endParaRPr lang="en-US" sz="700" dirty="0"/>
+          </a:p>
+        </p:txBody>
+      </p:sp>
+      <p:sp>
+        <p:nvSpPr>
+          <p:cNvPr id="16" name="Text 14"/>
+          <p:cNvSpPr/>
+          <p:nvPr/>
+        </p:nvSpPr>
+        <p:spPr>
+          <a:xfrm>
+            <a:off x="1490472" y="2523744"/>
+            <a:ext cx="841248" cy="164592"/>
+          </a:xfrm>
+          <a:prstGeom prst="rect">
+            <a:avLst/>
+          </a:prstGeom>
+          <a:noFill/>
+          <a:ln/>
+        </p:spPr>
+        <p:txBody>
+          <a:bodyPr wrap="square" lIns="0" tIns="0" rIns="0" bIns="0" rtlCol="0" anchor="ctr"/>
+          <a:lstStyle/>
+          <a:p>
+            <a:pPr algn="r" indent="0" marL="0">
+              <a:buNone/>
+            </a:pPr>
+            <a:r>
+              <a:rPr lang="en-US" sz="700" b="1" dirty="0">
+                <a:solidFill>
+                  <a:srgbClr val="000000"/>
+                </a:solidFill>
+                <a:latin typeface="Calibri" pitchFamily="34" charset="0"/>
+                <a:ea typeface="Calibri" pitchFamily="34" charset="-122"/>
+                <a:cs typeface="Calibri" pitchFamily="34" charset="-120"/>
+              </a:rPr>
+              <a:t>22,15%</a:t>
+            </a:r>
+            <a:endParaRPr lang="en-US" sz="700" dirty="0"/>
+          </a:p>
+        </p:txBody>
+      </p:sp>
+      <p:sp>
+        <p:nvSpPr>
+          <p:cNvPr id="17" name="Text 15"/>
+          <p:cNvSpPr/>
+          <p:nvPr/>
+        </p:nvSpPr>
+        <p:spPr>
+          <a:xfrm>
+            <a:off x="118872" y="2697480"/>
+            <a:ext cx="1371600" cy="164592"/>
+          </a:xfrm>
+          <a:prstGeom prst="rect">
+            <a:avLst/>
+          </a:prstGeom>
+          <a:noFill/>
+          <a:ln/>
+        </p:spPr>
+        <p:txBody>
+          <a:bodyPr wrap="square" lIns="0" tIns="0" rIns="0" bIns="0" rtlCol="0" anchor="ctr"/>
+          <a:lstStyle/>
+          <a:p>
+            <a:pPr indent="0" marL="0">
+              <a:buNone/>
+            </a:pPr>
+            <a:r>
+              <a:rPr lang="en-US" sz="700" dirty="0">
+                <a:solidFill>
+                  <a:srgbClr val="000000"/>
+                </a:solidFill>
+                <a:latin typeface="Calibri" pitchFamily="34" charset="0"/>
+                <a:ea typeface="Calibri" pitchFamily="34" charset="-122"/>
+                <a:cs typeface="Calibri" pitchFamily="34" charset="-120"/>
+              </a:rPr>
+              <a:t>Revisar</a:t>
+            </a:r>
+            <a:endParaRPr lang="en-US" sz="700" dirty="0"/>
+          </a:p>
+        </p:txBody>
+      </p:sp>
+      <p:sp>
+        <p:nvSpPr>
+          <p:cNvPr id="18" name="Text 16"/>
+          <p:cNvSpPr/>
+          <p:nvPr/>
+        </p:nvSpPr>
+        <p:spPr>
+          <a:xfrm>
+            <a:off x="1490472" y="2697480"/>
+            <a:ext cx="841248" cy="164592"/>
+          </a:xfrm>
+          <a:prstGeom prst="rect">
+            <a:avLst/>
+          </a:prstGeom>
+          <a:noFill/>
+          <a:ln/>
+        </p:spPr>
+        <p:txBody>
+          <a:bodyPr wrap="square" lIns="0" tIns="0" rIns="0" bIns="0" rtlCol="0" anchor="ctr"/>
+          <a:lstStyle/>
+          <a:p>
+            <a:pPr algn="r" indent="0" marL="0">
+              <a:buNone/>
+            </a:pPr>
+            <a:r>
+              <a:rPr lang="en-US" sz="700" b="1" dirty="0">
+                <a:solidFill>
+                  <a:srgbClr val="000000"/>
+                </a:solidFill>
+                <a:latin typeface="Calibri" pitchFamily="34" charset="0"/>
+                <a:ea typeface="Calibri" pitchFamily="34" charset="-122"/>
+                <a:cs typeface="Calibri" pitchFamily="34" charset="-120"/>
+              </a:rPr>
+              <a:t>11,65%</a:t>
+            </a:r>
+            <a:endParaRPr lang="en-US" sz="700" dirty="0"/>
+          </a:p>
+        </p:txBody>
+      </p:sp>
+      <p:sp>
+        <p:nvSpPr>
+          <p:cNvPr id="19" name="Shape 17"/>
+          <p:cNvSpPr/>
+          <p:nvPr/>
+        </p:nvSpPr>
+        <p:spPr>
+          <a:xfrm>
+            <a:off x="118872" y="2962656"/>
             <a:ext cx="2212848" cy="0"/>
           </a:xfrm>
           <a:prstGeom prst="line">
@@ -33538,13 +33772,13 @@
       </p:sp>
       <p:sp>
         <p:nvSpPr>
-          <p:cNvPr id="14" name="Text 12"/>
+          <p:cNvPr id="20" name="Text 18"/>
           <p:cNvSpPr/>
           <p:nvPr/>
         </p:nvSpPr>
         <p:spPr>
           <a:xfrm>
-            <a:off x="118872" y="2514600"/>
+            <a:off x="118872" y="3054096"/>
             <a:ext cx="2212848" cy="164592"/>
           </a:xfrm>
           <a:prstGeom prst="rect">
@@ -33577,13 +33811,13 @@
       </p:sp>
       <p:sp>
         <p:nvSpPr>
-          <p:cNvPr id="15" name="Shape 13"/>
+          <p:cNvPr id="21" name="Shape 19"/>
           <p:cNvSpPr/>
           <p:nvPr/>
         </p:nvSpPr>
         <p:spPr>
           <a:xfrm>
-            <a:off x="118872" y="2697480"/>
+            <a:off x="118872" y="3236976"/>
             <a:ext cx="2212848" cy="0"/>
           </a:xfrm>
           <a:prstGeom prst="line">
@@ -33600,13 +33834,13 @@
       </p:sp>
       <p:sp>
         <p:nvSpPr>
-          <p:cNvPr id="16" name="Text 14"/>
+          <p:cNvPr id="22" name="Text 20"/>
           <p:cNvSpPr/>
           <p:nvPr/>
         </p:nvSpPr>
         <p:spPr>
           <a:xfrm>
-            <a:off x="118872" y="2770632"/>
+            <a:off x="118872" y="3310128"/>
             <a:ext cx="1371600" cy="182880"/>
           </a:xfrm>
           <a:prstGeom prst="rect">
@@ -33639,13 +33873,13 @@
       </p:sp>
       <p:sp>
         <p:nvSpPr>
-          <p:cNvPr id="17" name="Text 15"/>
+          <p:cNvPr id="23" name="Text 21"/>
           <p:cNvSpPr/>
           <p:nvPr/>
         </p:nvSpPr>
         <p:spPr>
           <a:xfrm>
-            <a:off x="1490472" y="2770632"/>
+            <a:off x="1490472" y="3310128"/>
             <a:ext cx="841248" cy="182880"/>
           </a:xfrm>
           <a:prstGeom prst="rect">
@@ -33670,7 +33904,7 @@
                 <a:ea typeface="Calibri" pitchFamily="34" charset="-122"/>
                 <a:cs typeface="Calibri" pitchFamily="34" charset="-120"/>
               </a:rPr>
-              <a:t>63,16%</a:t>
+              <a:t>41,98%</a:t>
             </a:r>
             <a:endParaRPr lang="en-US" sz="750" dirty="0"/>
           </a:p>
@@ -33678,13 +33912,13 @@
       </p:sp>
       <p:sp>
         <p:nvSpPr>
-          <p:cNvPr id="18" name="Text 16"/>
+          <p:cNvPr id="24" name="Text 22"/>
           <p:cNvSpPr/>
           <p:nvPr/>
         </p:nvSpPr>
         <p:spPr>
           <a:xfrm>
-            <a:off x="118872" y="2971800"/>
+            <a:off x="118872" y="3511296"/>
             <a:ext cx="1371600" cy="182880"/>
           </a:xfrm>
           <a:prstGeom prst="rect">
@@ -33717,13 +33951,13 @@
       </p:sp>
       <p:sp>
         <p:nvSpPr>
-          <p:cNvPr id="19" name="Text 17"/>
+          <p:cNvPr id="25" name="Text 23"/>
           <p:cNvSpPr/>
           <p:nvPr/>
         </p:nvSpPr>
         <p:spPr>
           <a:xfrm>
-            <a:off x="1490472" y="2971800"/>
+            <a:off x="1490472" y="3511296"/>
             <a:ext cx="841248" cy="182880"/>
           </a:xfrm>
           <a:prstGeom prst="rect">
@@ -33748,7 +33982,7 @@
                 <a:ea typeface="Calibri" pitchFamily="34" charset="-122"/>
                 <a:cs typeface="Calibri" pitchFamily="34" charset="-120"/>
               </a:rPr>
-              <a:t>28,00%</a:t>
+              <a:t>46,23%</a:t>
             </a:r>
             <a:endParaRPr lang="en-US" sz="750" dirty="0"/>
           </a:p>
@@ -33756,13 +33990,13 @@
       </p:sp>
       <p:sp>
         <p:nvSpPr>
-          <p:cNvPr id="20" name="Text 18"/>
+          <p:cNvPr id="26" name="Text 24"/>
           <p:cNvSpPr/>
           <p:nvPr/>
         </p:nvSpPr>
         <p:spPr>
           <a:xfrm>
-            <a:off x="118872" y="3172968"/>
+            <a:off x="118872" y="3712464"/>
             <a:ext cx="1371600" cy="182880"/>
           </a:xfrm>
           <a:prstGeom prst="rect">
@@ -33795,13 +34029,13 @@
       </p:sp>
       <p:sp>
         <p:nvSpPr>
-          <p:cNvPr id="21" name="Text 19"/>
+          <p:cNvPr id="27" name="Text 25"/>
           <p:cNvSpPr/>
           <p:nvPr/>
         </p:nvSpPr>
         <p:spPr>
           <a:xfrm>
-            <a:off x="1490472" y="3172968"/>
+            <a:off x="1490472" y="3712464"/>
             <a:ext cx="841248" cy="182880"/>
           </a:xfrm>
           <a:prstGeom prst="rect">
@@ -33826,7 +34060,7 @@
                 <a:ea typeface="Calibri" pitchFamily="34" charset="-122"/>
                 <a:cs typeface="Calibri" pitchFamily="34" charset="-120"/>
               </a:rPr>
-              <a:t>8,84%</a:t>
+              <a:t>11,80%</a:t>
             </a:r>
             <a:endParaRPr lang="en-US" sz="750" dirty="0"/>
           </a:p>
@@ -33834,13 +34068,13 @@
       </p:sp>
       <p:sp>
         <p:nvSpPr>
-          <p:cNvPr id="22" name="Text 20"/>
+          <p:cNvPr id="28" name="Text 26"/>
           <p:cNvSpPr/>
           <p:nvPr/>
         </p:nvSpPr>
         <p:spPr>
           <a:xfrm>
-            <a:off x="118872" y="3374136"/>
+            <a:off x="118872" y="3913632"/>
             <a:ext cx="1371600" cy="182880"/>
           </a:xfrm>
           <a:prstGeom prst="rect">
@@ -33873,13 +34107,13 @@
       </p:sp>
       <p:sp>
         <p:nvSpPr>
-          <p:cNvPr id="23" name="Text 21"/>
+          <p:cNvPr id="29" name="Text 27"/>
           <p:cNvSpPr/>
           <p:nvPr/>
         </p:nvSpPr>
         <p:spPr>
           <a:xfrm>
-            <a:off x="1490472" y="3374136"/>
+            <a:off x="1490472" y="3913632"/>
             <a:ext cx="841248" cy="182880"/>
           </a:xfrm>
           <a:prstGeom prst="rect">
@@ -33912,7 +34146,7 @@
       </p:sp>
       <p:sp>
         <p:nvSpPr>
-          <p:cNvPr id="24" name="Text 22"/>
+          <p:cNvPr id="30" name="Text 28"/>
           <p:cNvSpPr/>
           <p:nvPr/>
         </p:nvSpPr>
@@ -33951,7 +34185,7 @@
       </p:sp>
       <p:sp>
         <p:nvSpPr>
-          <p:cNvPr id="25" name="Shape 23"/>
+          <p:cNvPr id="31" name="Shape 29"/>
           <p:cNvSpPr/>
           <p:nvPr/>
         </p:nvSpPr>
@@ -33974,7 +34208,7 @@
       </p:sp>
       <p:sp>
         <p:nvSpPr>
-          <p:cNvPr id="26" name="Text 24"/>
+          <p:cNvPr id="32" name="Text 30"/>
           <p:cNvSpPr/>
           <p:nvPr/>
         </p:nvSpPr>
@@ -34030,7 +34264,7 @@
       </p:sp>
       <p:sp>
         <p:nvSpPr>
-          <p:cNvPr id="27" name="Text 25"/>
+          <p:cNvPr id="33" name="Text 31"/>
           <p:cNvSpPr/>
           <p:nvPr/>
         </p:nvSpPr>
@@ -34086,7 +34320,7 @@
       </p:sp>
       <p:sp>
         <p:nvSpPr>
-          <p:cNvPr id="28" name="Text 26"/>
+          <p:cNvPr id="34" name="Text 32"/>
           <p:cNvSpPr/>
           <p:nvPr/>
         </p:nvSpPr>
@@ -34142,7 +34376,7 @@
       </p:sp>
       <p:sp>
         <p:nvSpPr>
-          <p:cNvPr id="29" name="Text 27"/>
+          <p:cNvPr id="35" name="Text 33"/>
           <p:cNvSpPr/>
           <p:nvPr/>
         </p:nvSpPr>
@@ -34198,7 +34432,7 @@
       </p:sp>
       <p:sp>
         <p:nvSpPr>
-          <p:cNvPr id="30" name="Text 28"/>
+          <p:cNvPr id="36" name="Text 34"/>
           <p:cNvSpPr/>
           <p:nvPr/>
         </p:nvSpPr>
@@ -34254,7 +34488,7 @@
       </p:sp>
       <p:sp>
         <p:nvSpPr>
-          <p:cNvPr id="31" name="Text 29"/>
+          <p:cNvPr id="37" name="Text 35"/>
           <p:cNvSpPr/>
           <p:nvPr/>
         </p:nvSpPr>
@@ -34310,7 +34544,7 @@
       </p:sp>
       <p:sp>
         <p:nvSpPr>
-          <p:cNvPr id="32" name="Text 30"/>
+          <p:cNvPr id="38" name="Text 36"/>
           <p:cNvSpPr/>
           <p:nvPr/>
         </p:nvSpPr>
@@ -34366,7 +34600,7 @@
       </p:sp>
       <p:sp>
         <p:nvSpPr>
-          <p:cNvPr id="33" name="Text 31"/>
+          <p:cNvPr id="39" name="Text 37"/>
           <p:cNvSpPr/>
           <p:nvPr/>
         </p:nvSpPr>
@@ -34422,7 +34656,7 @@
       </p:sp>
       <p:sp>
         <p:nvSpPr>
-          <p:cNvPr id="34" name="Text 32"/>
+          <p:cNvPr id="40" name="Text 38"/>
           <p:cNvSpPr/>
           <p:nvPr/>
         </p:nvSpPr>
@@ -34478,7 +34712,7 @@
       </p:sp>
       <p:sp>
         <p:nvSpPr>
-          <p:cNvPr id="35" name="Shape 33"/>
+          <p:cNvPr id="41" name="Shape 39"/>
           <p:cNvSpPr/>
           <p:nvPr/>
         </p:nvSpPr>
@@ -34501,7 +34735,7 @@
       </p:sp>
       <p:sp>
         <p:nvSpPr>
-          <p:cNvPr id="36" name="Text 34"/>
+          <p:cNvPr id="42" name="Text 40"/>
           <p:cNvSpPr/>
           <p:nvPr/>
         </p:nvSpPr>
@@ -34540,7 +34774,7 @@
       </p:sp>
       <p:sp>
         <p:nvSpPr>
-          <p:cNvPr id="37" name="Shape 35"/>
+          <p:cNvPr id="43" name="Shape 41"/>
           <p:cNvSpPr/>
           <p:nvPr/>
         </p:nvSpPr>
@@ -34563,7 +34797,7 @@
       </p:sp>
       <p:sp>
         <p:nvSpPr>
-          <p:cNvPr id="38" name="Text 36"/>
+          <p:cNvPr id="44" name="Text 42"/>
           <p:cNvSpPr/>
           <p:nvPr/>
         </p:nvSpPr>

--- a/folletos/2026-04/pptx/FIP_VANTRUST_LIQUIDEZ_RENDIMIENTO.pptx
+++ b/folletos/2026-04/pptx/FIP_VANTRUST_LIQUIDEZ_RENDIMIENTO.pptx
@@ -6373,7 +6373,7 @@
                 <a:ea typeface="Calibri" pitchFamily="34" charset="-122"/>
                 <a:cs typeface="Calibri" pitchFamily="34" charset="-120"/>
               </a:rPr>
-              <a:t>prueba CLP</a:t>
+              <a:t>prueba 8 CLP</a:t>
             </a:r>
             <a:endParaRPr lang="en-US" sz="800" dirty="0"/>
           </a:p>

--- a/folletos/2026-04/pptx/FIP_VANTRUST_LIQUIDEZ_RENDIMIENTO.pptx
+++ b/folletos/2026-04/pptx/FIP_VANTRUST_LIQUIDEZ_RENDIMIENTO.pptx
@@ -3114,7 +3114,7 @@
                 <a:ea typeface="Calibri" pitchFamily="34" charset="-122"/>
                 <a:cs typeface="Calibri" pitchFamily="34" charset="-120"/>
               </a:rPr>
-              <a:t>prueba CLP</a:t>
+              <a:t>prueba 10 CLP</a:t>
             </a:r>
             <a:endParaRPr lang="en-US" sz="800" dirty="0"/>
           </a:p>

--- a/folletos/2026-04/pptx/FIP_VANTRUST_LIQUIDEZ_RENDIMIENTO.pptx
+++ b/folletos/2026-04/pptx/FIP_VANTRUST_LIQUIDEZ_RENDIMIENTO.pptx
@@ -3114,7 +3114,7 @@
                 <a:ea typeface="Calibri" pitchFamily="34" charset="-122"/>
                 <a:cs typeface="Calibri" pitchFamily="34" charset="-120"/>
               </a:rPr>
-              <a:t>prueba 10 CLP</a:t>
+              <a:t>prueba 11 CLP</a:t>
             </a:r>
             <a:endParaRPr lang="en-US" sz="800" dirty="0"/>
           </a:p>

--- a/folletos/2026-04/pptx/FIP_VANTRUST_LIQUIDEZ_RENDIMIENTO.pptx
+++ b/folletos/2026-04/pptx/FIP_VANTRUST_LIQUIDEZ_RENDIMIENTO.pptx
@@ -3131,7 +3131,7 @@
                 <a:ea typeface="Calibri" pitchFamily="34" charset="-122"/>
                 <a:cs typeface="Calibri" pitchFamily="34" charset="-120"/>
               </a:rPr>
-              <a:t>prueba CLP</a:t>
+              <a:t>prueba 11 CLP</a:t>
             </a:r>
             <a:endParaRPr lang="en-US" sz="800" dirty="0"/>
           </a:p>

--- a/folletos/2026-04/pptx/FIP_VANTRUST_LIQUIDEZ_RENDIMIENTO.pptx
+++ b/folletos/2026-04/pptx/FIP_VANTRUST_LIQUIDEZ_RENDIMIENTO.pptx
@@ -3131,7 +3131,7 @@
                 <a:ea typeface="Calibri" pitchFamily="34" charset="-122"/>
                 <a:cs typeface="Calibri" pitchFamily="34" charset="-120"/>
               </a:rPr>
-              <a:t>prueba 11 CLP</a:t>
+              <a:t>prueba 12 CLP</a:t>
             </a:r>
             <a:endParaRPr lang="en-US" sz="800" dirty="0"/>
           </a:p>

--- a/folletos/2026-04/pptx/FIP_VANTRUST_LIQUIDEZ_RENDIMIENTO.pptx
+++ b/folletos/2026-04/pptx/FIP_VANTRUST_LIQUIDEZ_RENDIMIENTO.pptx
@@ -3113,7 +3113,7 @@
                 <a:ea typeface="Calibri" pitchFamily="34" charset="-122"/>
                 <a:cs typeface="Calibri" pitchFamily="34" charset="-120"/>
               </a:rPr>
-              <a:t>prueba CLP</a:t>
+              <a:t>prueba 12 CLP</a:t>
             </a:r>
             <a:endParaRPr lang="en-US" sz="800" dirty="0"/>
           </a:p>

--- a/folletos/2026-04/pptx/FIP_VANTRUST_LIQUIDEZ_RENDIMIENTO.pptx
+++ b/folletos/2026-04/pptx/FIP_VANTRUST_LIQUIDEZ_RENDIMIENTO.pptx
@@ -3113,7 +3113,7 @@
                 <a:ea typeface="Calibri" pitchFamily="34" charset="-122"/>
                 <a:cs typeface="Calibri" pitchFamily="34" charset="-120"/>
               </a:rPr>
-              <a:t>prueba 12 CLP</a:t>
+              <a:t>prueba CLP</a:t>
             </a:r>
             <a:endParaRPr lang="en-US" sz="800" dirty="0"/>
           </a:p>
@@ -7458,7 +7458,7 @@
                           <a:ea typeface="Calibri" pitchFamily="34" charset="-122"/>
                           <a:cs typeface="Calibri" pitchFamily="34" charset="-120"/>
                         </a:rPr>
-                        <a:t>0.00%</a:t>
+                        <a:t>0.01%</a:t>
                       </a:r>
                       <a:endParaRPr lang="en-US" sz="500" dirty="0">
                         <a:latin typeface="Calibri" charset="0"/>
@@ -7523,7 +7523,7 @@
                           <a:ea typeface="Calibri" pitchFamily="34" charset="-122"/>
                           <a:cs typeface="Calibri" pitchFamily="34" charset="-120"/>
                         </a:rPr>
-                        <a:t>0.00%</a:t>
+                        <a:t>0.01%</a:t>
                       </a:r>
                       <a:endParaRPr lang="en-US" sz="500" dirty="0">
                         <a:latin typeface="Calibri" charset="0"/>
@@ -7588,7 +7588,7 @@
                           <a:ea typeface="Calibri" pitchFamily="34" charset="-122"/>
                           <a:cs typeface="Calibri" pitchFamily="34" charset="-120"/>
                         </a:rPr>
-                        <a:t>-0.00%</a:t>
+                        <a:t>-0.01%</a:t>
                       </a:r>
                       <a:endParaRPr lang="en-US" sz="500" dirty="0">
                         <a:latin typeface="Calibri" charset="0"/>
@@ -7653,7 +7653,7 @@
                           <a:ea typeface="Calibri" pitchFamily="34" charset="-122"/>
                           <a:cs typeface="Calibri" pitchFamily="34" charset="-120"/>
                         </a:rPr>
-                        <a:t>0.00%</a:t>
+                        <a:t>0.10%</a:t>
                       </a:r>
                       <a:endParaRPr lang="en-US" sz="500" dirty="0">
                         <a:latin typeface="Calibri" charset="0"/>
@@ -7718,7 +7718,7 @@
                           <a:ea typeface="Calibri" pitchFamily="34" charset="-122"/>
                           <a:cs typeface="Calibri" pitchFamily="34" charset="-120"/>
                         </a:rPr>
-                        <a:t>0.00%</a:t>
+                        <a:t>0.13%</a:t>
                       </a:r>
                       <a:endParaRPr lang="en-US" sz="500" dirty="0">
                         <a:latin typeface="Calibri" charset="0"/>
@@ -7848,7 +7848,7 @@
                           <a:ea typeface="Calibri" pitchFamily="34" charset="-122"/>
                           <a:cs typeface="Calibri" pitchFamily="34" charset="-120"/>
                         </a:rPr>
-                        <a:t>0.60%</a:t>
+                        <a:t>0.83%</a:t>
                       </a:r>
                       <a:endParaRPr lang="en-US" sz="500" dirty="0">
                         <a:latin typeface="Calibri" charset="0"/>
@@ -8358,7 +8358,7 @@
                           <a:ea typeface="Calibri" pitchFamily="34" charset="-122"/>
                           <a:cs typeface="Calibri" pitchFamily="34" charset="-120"/>
                         </a:rPr>
-                        <a:t>0.00%</a:t>
+                        <a:t>0.01%</a:t>
                       </a:r>
                       <a:endParaRPr lang="en-US" sz="500" dirty="0">
                         <a:latin typeface="Calibri" charset="0"/>
@@ -8423,7 +8423,7 @@
                           <a:ea typeface="Calibri" pitchFamily="34" charset="-122"/>
                           <a:cs typeface="Calibri" pitchFamily="34" charset="-120"/>
                         </a:rPr>
-                        <a:t>0.00%</a:t>
+                        <a:t>0.16%</a:t>
                       </a:r>
                       <a:endParaRPr lang="en-US" sz="500" dirty="0">
                         <a:latin typeface="Calibri" charset="0"/>
@@ -8488,7 +8488,7 @@
                           <a:ea typeface="Calibri" pitchFamily="34" charset="-122"/>
                           <a:cs typeface="Calibri" pitchFamily="34" charset="-120"/>
                         </a:rPr>
-                        <a:t>0.00%</a:t>
+                        <a:t>0.13%</a:t>
                       </a:r>
                       <a:endParaRPr lang="en-US" sz="500" dirty="0">
                         <a:latin typeface="Calibri" charset="0"/>
@@ -8553,7 +8553,7 @@
                           <a:ea typeface="Calibri" pitchFamily="34" charset="-122"/>
                           <a:cs typeface="Calibri" pitchFamily="34" charset="-120"/>
                         </a:rPr>
-                        <a:t>0.00%</a:t>
+                        <a:t>0.12%</a:t>
                       </a:r>
                       <a:endParaRPr lang="en-US" sz="500" dirty="0">
                         <a:latin typeface="Calibri" charset="0"/>
@@ -8618,7 +8618,7 @@
                           <a:ea typeface="Calibri" pitchFamily="34" charset="-122"/>
                           <a:cs typeface="Calibri" pitchFamily="34" charset="-120"/>
                         </a:rPr>
-                        <a:t>0.00%</a:t>
+                        <a:t>0.14%</a:t>
                       </a:r>
                       <a:endParaRPr lang="en-US" sz="500" dirty="0">
                         <a:latin typeface="Calibri" charset="0"/>
@@ -8683,7 +8683,7 @@
                           <a:ea typeface="Calibri" pitchFamily="34" charset="-122"/>
                           <a:cs typeface="Calibri" pitchFamily="34" charset="-120"/>
                         </a:rPr>
-                        <a:t>0.00%</a:t>
+                        <a:t>0.18%</a:t>
                       </a:r>
                       <a:endParaRPr lang="en-US" sz="500" dirty="0">
                         <a:latin typeface="Calibri" charset="0"/>
@@ -8748,7 +8748,7 @@
                           <a:ea typeface="Calibri" pitchFamily="34" charset="-122"/>
                           <a:cs typeface="Calibri" pitchFamily="34" charset="-120"/>
                         </a:rPr>
-                        <a:t>0.01%</a:t>
+                        <a:t>0.75%</a:t>
                       </a:r>
                       <a:endParaRPr lang="en-US" sz="500" dirty="0">
                         <a:latin typeface="Calibri" charset="0"/>
@@ -9976,7 +9976,7 @@
                           <a:ea typeface="Calibri" pitchFamily="34" charset="-122"/>
                           <a:cs typeface="Calibri" pitchFamily="34" charset="-120"/>
                         </a:rPr>
-                        <a:t>0.00%</a:t>
+                        <a:t>0.33%</a:t>
                       </a:r>
                       <a:endParaRPr lang="en-US" sz="500" dirty="0">
                         <a:latin typeface="Calibri" charset="0"/>
@@ -10041,7 +10041,7 @@
                           <a:ea typeface="Calibri" pitchFamily="34" charset="-122"/>
                           <a:cs typeface="Calibri" pitchFamily="34" charset="-120"/>
                         </a:rPr>
-                        <a:t>0.00%</a:t>
+                        <a:t>0.38%</a:t>
                       </a:r>
                       <a:endParaRPr lang="en-US" sz="500" dirty="0">
                         <a:latin typeface="Calibri" charset="0"/>
@@ -10106,7 +10106,7 @@
                           <a:ea typeface="Calibri" pitchFamily="34" charset="-122"/>
                           <a:cs typeface="Calibri" pitchFamily="34" charset="-120"/>
                         </a:rPr>
-                        <a:t>0.00%</a:t>
+                        <a:t>0.46%</a:t>
                       </a:r>
                       <a:endParaRPr lang="en-US" sz="500" dirty="0">
                         <a:latin typeface="Calibri" charset="0"/>
@@ -10171,7 +10171,7 @@
                           <a:ea typeface="Calibri" pitchFamily="34" charset="-122"/>
                           <a:cs typeface="Calibri" pitchFamily="34" charset="-120"/>
                         </a:rPr>
-                        <a:t>0.01%</a:t>
+                        <a:t>0.55%</a:t>
                       </a:r>
                       <a:endParaRPr lang="en-US" sz="500" dirty="0">
                         <a:latin typeface="Calibri" charset="0"/>
@@ -10236,7 +10236,7 @@
                           <a:ea typeface="Calibri" pitchFamily="34" charset="-122"/>
                           <a:cs typeface="Calibri" pitchFamily="34" charset="-120"/>
                         </a:rPr>
-                        <a:t>0.01%</a:t>
+                        <a:t>0.59%</a:t>
                       </a:r>
                       <a:endParaRPr lang="en-US" sz="500" dirty="0">
                         <a:latin typeface="Calibri" charset="0"/>
@@ -10301,7 +10301,7 @@
                           <a:ea typeface="Calibri" pitchFamily="34" charset="-122"/>
                           <a:cs typeface="Calibri" pitchFamily="34" charset="-120"/>
                         </a:rPr>
-                        <a:t>0.01%</a:t>
+                        <a:t>0.65%</a:t>
                       </a:r>
                       <a:endParaRPr lang="en-US" sz="500" dirty="0">
                         <a:latin typeface="Calibri" charset="0"/>
@@ -10366,7 +10366,7 @@
                           <a:ea typeface="Calibri" pitchFamily="34" charset="-122"/>
                           <a:cs typeface="Calibri" pitchFamily="34" charset="-120"/>
                         </a:rPr>
-                        <a:t>0.01%</a:t>
+                        <a:t>0.70%</a:t>
                       </a:r>
                       <a:endParaRPr lang="en-US" sz="500" dirty="0">
                         <a:latin typeface="Calibri" charset="0"/>
@@ -10431,7 +10431,7 @@
                           <a:ea typeface="Calibri" pitchFamily="34" charset="-122"/>
                           <a:cs typeface="Calibri" pitchFamily="34" charset="-120"/>
                         </a:rPr>
-                        <a:t>0.01%</a:t>
+                        <a:t>0.73%</a:t>
                       </a:r>
                       <a:endParaRPr lang="en-US" sz="500" dirty="0">
                         <a:latin typeface="Calibri" charset="0"/>
@@ -10496,7 +10496,7 @@
                           <a:ea typeface="Calibri" pitchFamily="34" charset="-122"/>
                           <a:cs typeface="Calibri" pitchFamily="34" charset="-120"/>
                         </a:rPr>
-                        <a:t>0.01%</a:t>
+                        <a:t>0.72%</a:t>
                       </a:r>
                       <a:endParaRPr lang="en-US" sz="500" dirty="0">
                         <a:latin typeface="Calibri" charset="0"/>
@@ -10561,7 +10561,7 @@
                           <a:ea typeface="Calibri" pitchFamily="34" charset="-122"/>
                           <a:cs typeface="Calibri" pitchFamily="34" charset="-120"/>
                         </a:rPr>
-                        <a:t>0.01%</a:t>
+                        <a:t>0.87%</a:t>
                       </a:r>
                       <a:endParaRPr lang="en-US" sz="500" dirty="0">
                         <a:latin typeface="Calibri" charset="0"/>
@@ -10691,7 +10691,7 @@
                           <a:ea typeface="Calibri" pitchFamily="34" charset="-122"/>
                           <a:cs typeface="Calibri" pitchFamily="34" charset="-120"/>
                         </a:rPr>
-                        <a:t>8.50%</a:t>
+                        <a:t>15.11%</a:t>
                       </a:r>
                       <a:endParaRPr lang="en-US" sz="500" dirty="0">
                         <a:latin typeface="Calibri" charset="0"/>
@@ -10877,7 +10877,7 @@
                           <a:ea typeface="Calibri" pitchFamily="34" charset="-122"/>
                           <a:cs typeface="Calibri" pitchFamily="34" charset="-120"/>
                         </a:rPr>
-                        <a:t>0.00%</a:t>
+                        <a:t>0.31%</a:t>
                       </a:r>
                       <a:endParaRPr lang="en-US" sz="500" dirty="0">
                         <a:latin typeface="Calibri" charset="0"/>
@@ -10942,7 +10942,7 @@
                           <a:ea typeface="Calibri" pitchFamily="34" charset="-122"/>
                           <a:cs typeface="Calibri" pitchFamily="34" charset="-120"/>
                         </a:rPr>
-                        <a:t>0.00%</a:t>
+                        <a:t>0.35%</a:t>
                       </a:r>
                       <a:endParaRPr lang="en-US" sz="500" dirty="0">
                         <a:latin typeface="Calibri" charset="0"/>
@@ -11007,7 +11007,7 @@
                           <a:ea typeface="Calibri" pitchFamily="34" charset="-122"/>
                           <a:cs typeface="Calibri" pitchFamily="34" charset="-120"/>
                         </a:rPr>
-                        <a:t>0.00%</a:t>
+                        <a:t>0.43%</a:t>
                       </a:r>
                       <a:endParaRPr lang="en-US" sz="500" dirty="0">
                         <a:latin typeface="Calibri" charset="0"/>
@@ -11072,7 +11072,7 @@
                           <a:ea typeface="Calibri" pitchFamily="34" charset="-122"/>
                           <a:cs typeface="Calibri" pitchFamily="34" charset="-120"/>
                         </a:rPr>
-                        <a:t>0.01%</a:t>
+                        <a:t>0.61%</a:t>
                       </a:r>
                       <a:endParaRPr lang="en-US" sz="500" dirty="0">
                         <a:latin typeface="Calibri" charset="0"/>
@@ -11137,7 +11137,7 @@
                           <a:ea typeface="Calibri" pitchFamily="34" charset="-122"/>
                           <a:cs typeface="Calibri" pitchFamily="34" charset="-120"/>
                         </a:rPr>
-                        <a:t>0.01%</a:t>
+                        <a:t>0.78%</a:t>
                       </a:r>
                       <a:endParaRPr lang="en-US" sz="500" dirty="0">
                         <a:latin typeface="Calibri" charset="0"/>
@@ -11202,7 +11202,7 @@
                           <a:ea typeface="Calibri" pitchFamily="34" charset="-122"/>
                           <a:cs typeface="Calibri" pitchFamily="34" charset="-120"/>
                         </a:rPr>
-                        <a:t>0.01%</a:t>
+                        <a:t>0.74%</a:t>
                       </a:r>
                       <a:endParaRPr lang="en-US" sz="500" dirty="0">
                         <a:latin typeface="Calibri" charset="0"/>
@@ -11267,7 +11267,7 @@
                           <a:ea typeface="Calibri" pitchFamily="34" charset="-122"/>
                           <a:cs typeface="Calibri" pitchFamily="34" charset="-120"/>
                         </a:rPr>
-                        <a:t>0.01%</a:t>
+                        <a:t>0.82%</a:t>
                       </a:r>
                       <a:endParaRPr lang="en-US" sz="500" dirty="0">
                         <a:latin typeface="Calibri" charset="0"/>
@@ -11332,7 +11332,7 @@
                           <a:ea typeface="Calibri" pitchFamily="34" charset="-122"/>
                           <a:cs typeface="Calibri" pitchFamily="34" charset="-120"/>
                         </a:rPr>
-                        <a:t>0.01%</a:t>
+                        <a:t>0.87%</a:t>
                       </a:r>
                       <a:endParaRPr lang="en-US" sz="500" dirty="0">
                         <a:latin typeface="Calibri" charset="0"/>
@@ -11397,7 +11397,7 @@
                           <a:ea typeface="Calibri" pitchFamily="34" charset="-122"/>
                           <a:cs typeface="Calibri" pitchFamily="34" charset="-120"/>
                         </a:rPr>
-                        <a:t>0.01%</a:t>
+                        <a:t>0.94%</a:t>
                       </a:r>
                       <a:endParaRPr lang="en-US" sz="500" dirty="0">
                         <a:latin typeface="Calibri" charset="0"/>
@@ -11462,7 +11462,7 @@
                           <a:ea typeface="Calibri" pitchFamily="34" charset="-122"/>
                           <a:cs typeface="Calibri" pitchFamily="34" charset="-120"/>
                         </a:rPr>
-                        <a:t>0.01%</a:t>
+                        <a:t>0.93%</a:t>
                       </a:r>
                       <a:endParaRPr lang="en-US" sz="500" dirty="0">
                         <a:latin typeface="Calibri" charset="0"/>
@@ -11527,7 +11527,7 @@
                           <a:ea typeface="Calibri" pitchFamily="34" charset="-122"/>
                           <a:cs typeface="Calibri" pitchFamily="34" charset="-120"/>
                         </a:rPr>
-                        <a:t>0.01%</a:t>
+                        <a:t>1.05%</a:t>
                       </a:r>
                       <a:endParaRPr lang="en-US" sz="500" dirty="0">
                         <a:latin typeface="Calibri" charset="0"/>
@@ -11592,7 +11592,7 @@
                           <a:ea typeface="Calibri" pitchFamily="34" charset="-122"/>
                           <a:cs typeface="Calibri" pitchFamily="34" charset="-120"/>
                         </a:rPr>
-                        <a:t>0.01%</a:t>
+                        <a:t>1.01%</a:t>
                       </a:r>
                       <a:endParaRPr lang="en-US" sz="500" dirty="0">
                         <a:latin typeface="Calibri" charset="0"/>
@@ -11657,7 +11657,7 @@
                           <a:ea typeface="Calibri" pitchFamily="34" charset="-122"/>
                           <a:cs typeface="Calibri" pitchFamily="34" charset="-120"/>
                         </a:rPr>
-                        <a:t>0.09%</a:t>
+                        <a:t>9.20%</a:t>
                       </a:r>
                       <a:endParaRPr lang="en-US" sz="500" dirty="0">
                         <a:latin typeface="Calibri" charset="0"/>
@@ -12885,7 +12885,7 @@
                           <a:ea typeface="Calibri" pitchFamily="34" charset="-122"/>
                           <a:cs typeface="Calibri" pitchFamily="34" charset="-120"/>
                         </a:rPr>
-                        <a:t>0.01%</a:t>
+                        <a:t>0.74%</a:t>
                       </a:r>
                       <a:endParaRPr lang="en-US" sz="500" dirty="0">
                         <a:latin typeface="Calibri" charset="0"/>
@@ -12950,7 +12950,7 @@
                           <a:ea typeface="Calibri" pitchFamily="34" charset="-122"/>
                           <a:cs typeface="Calibri" pitchFamily="34" charset="-120"/>
                         </a:rPr>
-                        <a:t>0.01%</a:t>
+                        <a:t>0.82%</a:t>
                       </a:r>
                       <a:endParaRPr lang="en-US" sz="500" dirty="0">
                         <a:latin typeface="Calibri" charset="0"/>
@@ -13015,7 +13015,7 @@
                           <a:ea typeface="Calibri" pitchFamily="34" charset="-122"/>
                           <a:cs typeface="Calibri" pitchFamily="34" charset="-120"/>
                         </a:rPr>
-                        <a:t>0.01%</a:t>
+                        <a:t>0.75%</a:t>
                       </a:r>
                       <a:endParaRPr lang="en-US" sz="500" dirty="0">
                         <a:latin typeface="Calibri" charset="0"/>
@@ -13080,7 +13080,7 @@
                           <a:ea typeface="Calibri" pitchFamily="34" charset="-122"/>
                           <a:cs typeface="Calibri" pitchFamily="34" charset="-120"/>
                         </a:rPr>
-                        <a:t>0.01%</a:t>
+                        <a:t>0.88%</a:t>
                       </a:r>
                       <a:endParaRPr lang="en-US" sz="500" dirty="0">
                         <a:latin typeface="Calibri" charset="0"/>
@@ -13145,7 +13145,7 @@
                           <a:ea typeface="Calibri" pitchFamily="34" charset="-122"/>
                           <a:cs typeface="Calibri" pitchFamily="34" charset="-120"/>
                         </a:rPr>
-                        <a:t>0.01%</a:t>
+                        <a:t>0.80%</a:t>
                       </a:r>
                       <a:endParaRPr lang="en-US" sz="500" dirty="0">
                         <a:latin typeface="Calibri" charset="0"/>
@@ -13210,7 +13210,7 @@
                           <a:ea typeface="Calibri" pitchFamily="34" charset="-122"/>
                           <a:cs typeface="Calibri" pitchFamily="34" charset="-120"/>
                         </a:rPr>
-                        <a:t>0.01%</a:t>
+                        <a:t>0.82%</a:t>
                       </a:r>
                       <a:endParaRPr lang="en-US" sz="500" dirty="0">
                         <a:latin typeface="Calibri" charset="0"/>
@@ -13275,7 +13275,7 @@
                           <a:ea typeface="Calibri" pitchFamily="34" charset="-122"/>
                           <a:cs typeface="Calibri" pitchFamily="34" charset="-120"/>
                         </a:rPr>
-                        <a:t>0.01%</a:t>
+                        <a:t>0.76%</a:t>
                       </a:r>
                       <a:endParaRPr lang="en-US" sz="500" dirty="0">
                         <a:latin typeface="Calibri" charset="0"/>
@@ -13340,7 +13340,7 @@
                           <a:ea typeface="Calibri" pitchFamily="34" charset="-122"/>
                           <a:cs typeface="Calibri" pitchFamily="34" charset="-120"/>
                         </a:rPr>
-                        <a:t>0.01%</a:t>
+                        <a:t>0.68%</a:t>
                       </a:r>
                       <a:endParaRPr lang="en-US" sz="500" dirty="0">
                         <a:latin typeface="Calibri" charset="0"/>
@@ -13405,7 +13405,7 @@
                           <a:ea typeface="Calibri" pitchFamily="34" charset="-122"/>
                           <a:cs typeface="Calibri" pitchFamily="34" charset="-120"/>
                         </a:rPr>
-                        <a:t>0.01%</a:t>
+                        <a:t>0.67%</a:t>
                       </a:r>
                       <a:endParaRPr lang="en-US" sz="500" dirty="0">
                         <a:latin typeface="Calibri" charset="0"/>
@@ -13470,7 +13470,7 @@
                           <a:ea typeface="Calibri" pitchFamily="34" charset="-122"/>
                           <a:cs typeface="Calibri" pitchFamily="34" charset="-120"/>
                         </a:rPr>
-                        <a:t>0.01%</a:t>
+                        <a:t>0.62%</a:t>
                       </a:r>
                       <a:endParaRPr lang="en-US" sz="500" dirty="0">
                         <a:latin typeface="Calibri" charset="0"/>
@@ -13600,7 +13600,7 @@
                           <a:ea typeface="Calibri" pitchFamily="34" charset="-122"/>
                           <a:cs typeface="Calibri" pitchFamily="34" charset="-120"/>
                         </a:rPr>
-                        <a:t>7.57%</a:t>
+                        <a:t>15.86%</a:t>
                       </a:r>
                       <a:endParaRPr lang="en-US" sz="500" dirty="0">
                         <a:latin typeface="Calibri" charset="0"/>
@@ -13786,7 +13786,7 @@
                           <a:ea typeface="Calibri" pitchFamily="34" charset="-122"/>
                           <a:cs typeface="Calibri" pitchFamily="34" charset="-120"/>
                         </a:rPr>
-                        <a:t>0.01%</a:t>
+                        <a:t>1.12%</a:t>
                       </a:r>
                       <a:endParaRPr lang="en-US" sz="500" dirty="0">
                         <a:latin typeface="Calibri" charset="0"/>
@@ -13851,7 +13851,7 @@
                           <a:ea typeface="Calibri" pitchFamily="34" charset="-122"/>
                           <a:cs typeface="Calibri" pitchFamily="34" charset="-120"/>
                         </a:rPr>
-                        <a:t>0.01%</a:t>
+                        <a:t>0.94%</a:t>
                       </a:r>
                       <a:endParaRPr lang="en-US" sz="500" dirty="0">
                         <a:latin typeface="Calibri" charset="0"/>
@@ -13916,7 +13916,7 @@
                           <a:ea typeface="Calibri" pitchFamily="34" charset="-122"/>
                           <a:cs typeface="Calibri" pitchFamily="34" charset="-120"/>
                         </a:rPr>
-                        <a:t>0.01%</a:t>
+                        <a:t>1.09%</a:t>
                       </a:r>
                       <a:endParaRPr lang="en-US" sz="500" dirty="0">
                         <a:latin typeface="Calibri" charset="0"/>
@@ -13981,7 +13981,7 @@
                           <a:ea typeface="Calibri" pitchFamily="34" charset="-122"/>
                           <a:cs typeface="Calibri" pitchFamily="34" charset="-120"/>
                         </a:rPr>
-                        <a:t>0.01%</a:t>
+                        <a:t>1.00%</a:t>
                       </a:r>
                       <a:endParaRPr lang="en-US" sz="500" dirty="0">
                         <a:latin typeface="Calibri" charset="0"/>
@@ -14046,7 +14046,7 @@
                           <a:ea typeface="Calibri" pitchFamily="34" charset="-122"/>
                           <a:cs typeface="Calibri" pitchFamily="34" charset="-120"/>
                         </a:rPr>
-                        <a:t>0.01%</a:t>
+                        <a:t>1.17%</a:t>
                       </a:r>
                       <a:endParaRPr lang="en-US" sz="500" dirty="0">
                         <a:latin typeface="Calibri" charset="0"/>
@@ -14111,7 +14111,7 @@
                           <a:ea typeface="Calibri" pitchFamily="34" charset="-122"/>
                           <a:cs typeface="Calibri" pitchFamily="34" charset="-120"/>
                         </a:rPr>
-                        <a:t>0.01%</a:t>
+                        <a:t>1.05%</a:t>
                       </a:r>
                       <a:endParaRPr lang="en-US" sz="500" dirty="0">
                         <a:latin typeface="Calibri" charset="0"/>
@@ -14176,7 +14176,7 @@
                           <a:ea typeface="Calibri" pitchFamily="34" charset="-122"/>
                           <a:cs typeface="Calibri" pitchFamily="34" charset="-120"/>
                         </a:rPr>
-                        <a:t>0.01%</a:t>
+                        <a:t>1.09%</a:t>
                       </a:r>
                       <a:endParaRPr lang="en-US" sz="500" dirty="0">
                         <a:latin typeface="Calibri" charset="0"/>
@@ -14241,7 +14241,7 @@
                           <a:ea typeface="Calibri" pitchFamily="34" charset="-122"/>
                           <a:cs typeface="Calibri" pitchFamily="34" charset="-120"/>
                         </a:rPr>
-                        <a:t>0.01%</a:t>
+                        <a:t>1.06%</a:t>
                       </a:r>
                       <a:endParaRPr lang="en-US" sz="500" dirty="0">
                         <a:latin typeface="Calibri" charset="0"/>
@@ -14306,7 +14306,7 @@
                           <a:ea typeface="Calibri" pitchFamily="34" charset="-122"/>
                           <a:cs typeface="Calibri" pitchFamily="34" charset="-120"/>
                         </a:rPr>
-                        <a:t>0.01%</a:t>
+                        <a:t>0.97%</a:t>
                       </a:r>
                       <a:endParaRPr lang="en-US" sz="500" dirty="0">
                         <a:latin typeface="Calibri" charset="0"/>
@@ -14371,7 +14371,7 @@
                           <a:ea typeface="Calibri" pitchFamily="34" charset="-122"/>
                           <a:cs typeface="Calibri" pitchFamily="34" charset="-120"/>
                         </a:rPr>
-                        <a:t>0.01%</a:t>
+                        <a:t>0.95%</a:t>
                       </a:r>
                       <a:endParaRPr lang="en-US" sz="500" dirty="0">
                         <a:latin typeface="Calibri" charset="0"/>
@@ -14436,7 +14436,7 @@
                           <a:ea typeface="Calibri" pitchFamily="34" charset="-122"/>
                           <a:cs typeface="Calibri" pitchFamily="34" charset="-120"/>
                         </a:rPr>
-                        <a:t>0.01%</a:t>
+                        <a:t>0.89%</a:t>
                       </a:r>
                       <a:endParaRPr lang="en-US" sz="500" dirty="0">
                         <a:latin typeface="Calibri" charset="0"/>
@@ -14501,7 +14501,7 @@
                           <a:ea typeface="Calibri" pitchFamily="34" charset="-122"/>
                           <a:cs typeface="Calibri" pitchFamily="34" charset="-120"/>
                         </a:rPr>
-                        <a:t>0.01%</a:t>
+                        <a:t>0.88%</a:t>
                       </a:r>
                       <a:endParaRPr lang="en-US" sz="500" dirty="0">
                         <a:latin typeface="Calibri" charset="0"/>
@@ -14566,7 +14566,7 @@
                           <a:ea typeface="Calibri" pitchFamily="34" charset="-122"/>
                           <a:cs typeface="Calibri" pitchFamily="34" charset="-120"/>
                         </a:rPr>
-                        <a:t>0.12%</a:t>
+                        <a:t>12.90%</a:t>
                       </a:r>
                       <a:endParaRPr lang="en-US" sz="500" dirty="0">
                         <a:latin typeface="Calibri" charset="0"/>
@@ -15794,7 +15794,7 @@
                           <a:ea typeface="Calibri" pitchFamily="34" charset="-122"/>
                           <a:cs typeface="Calibri" pitchFamily="34" charset="-120"/>
                         </a:rPr>
-                        <a:t>0.01%</a:t>
+                        <a:t>0.51%</a:t>
                       </a:r>
                       <a:endParaRPr lang="en-US" sz="500" dirty="0">
                         <a:latin typeface="Calibri" charset="0"/>
@@ -15859,7 +15859,7 @@
                           <a:ea typeface="Calibri" pitchFamily="34" charset="-122"/>
                           <a:cs typeface="Calibri" pitchFamily="34" charset="-120"/>
                         </a:rPr>
-                        <a:t>0.00%</a:t>
+                        <a:t>0.45%</a:t>
                       </a:r>
                       <a:endParaRPr lang="en-US" sz="500" dirty="0">
                         <a:latin typeface="Calibri" charset="0"/>
@@ -15924,7 +15924,7 @@
                           <a:ea typeface="Calibri" pitchFamily="34" charset="-122"/>
                           <a:cs typeface="Calibri" pitchFamily="34" charset="-120"/>
                         </a:rPr>
-                        <a:t>0.00%</a:t>
+                        <a:t>0.47%</a:t>
                       </a:r>
                       <a:endParaRPr lang="en-US" sz="500" dirty="0">
                         <a:latin typeface="Calibri" charset="0"/>
@@ -15989,7 +15989,7 @@
                           <a:ea typeface="Calibri" pitchFamily="34" charset="-122"/>
                           <a:cs typeface="Calibri" pitchFamily="34" charset="-120"/>
                         </a:rPr>
-                        <a:t>0.00%</a:t>
+                        <a:t>0.42%</a:t>
                       </a:r>
                       <a:endParaRPr lang="en-US" sz="500" dirty="0">
                         <a:latin typeface="Calibri" charset="0"/>
@@ -16054,7 +16054,7 @@
                           <a:ea typeface="Calibri" pitchFamily="34" charset="-122"/>
                           <a:cs typeface="Calibri" pitchFamily="34" charset="-120"/>
                         </a:rPr>
-                        <a:t>0.00%</a:t>
+                        <a:t>0.37%</a:t>
                       </a:r>
                       <a:endParaRPr lang="en-US" sz="500" dirty="0">
                         <a:latin typeface="Calibri" charset="0"/>
@@ -16119,7 +16119,7 @@
                           <a:ea typeface="Calibri" pitchFamily="34" charset="-122"/>
                           <a:cs typeface="Calibri" pitchFamily="34" charset="-120"/>
                         </a:rPr>
-                        <a:t>0.00%</a:t>
+                        <a:t>0.36%</a:t>
                       </a:r>
                       <a:endParaRPr lang="en-US" sz="500" dirty="0">
                         <a:latin typeface="Calibri" charset="0"/>
@@ -16184,7 +16184,7 @@
                           <a:ea typeface="Calibri" pitchFamily="34" charset="-122"/>
                           <a:cs typeface="Calibri" pitchFamily="34" charset="-120"/>
                         </a:rPr>
-                        <a:t>0.00%</a:t>
+                        <a:t>0.36%</a:t>
                       </a:r>
                       <a:endParaRPr lang="en-US" sz="500" dirty="0">
                         <a:latin typeface="Calibri" charset="0"/>
@@ -16249,7 +16249,7 @@
                           <a:ea typeface="Calibri" pitchFamily="34" charset="-122"/>
                           <a:cs typeface="Calibri" pitchFamily="34" charset="-120"/>
                         </a:rPr>
-                        <a:t>0.00%</a:t>
+                        <a:t>0.34%</a:t>
                       </a:r>
                       <a:endParaRPr lang="en-US" sz="500" dirty="0">
                         <a:latin typeface="Calibri" charset="0"/>
@@ -16314,7 +16314,7 @@
                           <a:ea typeface="Calibri" pitchFamily="34" charset="-122"/>
                           <a:cs typeface="Calibri" pitchFamily="34" charset="-120"/>
                         </a:rPr>
-                        <a:t>0.00%</a:t>
+                        <a:t>0.34%</a:t>
                       </a:r>
                       <a:endParaRPr lang="en-US" sz="500" dirty="0">
                         <a:latin typeface="Calibri" charset="0"/>
@@ -16379,7 +16379,7 @@
                           <a:ea typeface="Calibri" pitchFamily="34" charset="-122"/>
                           <a:cs typeface="Calibri" pitchFamily="34" charset="-120"/>
                         </a:rPr>
-                        <a:t>0.00%</a:t>
+                        <a:t>0.32%</a:t>
                       </a:r>
                       <a:endParaRPr lang="en-US" sz="500" dirty="0">
                         <a:latin typeface="Calibri" charset="0"/>
@@ -16509,7 +16509,7 @@
                           <a:ea typeface="Calibri" pitchFamily="34" charset="-122"/>
                           <a:cs typeface="Calibri" pitchFamily="34" charset="-120"/>
                         </a:rPr>
-                        <a:t>-2.95%</a:t>
+                        <a:t>0.90%</a:t>
                       </a:r>
                       <a:endParaRPr lang="en-US" sz="500" dirty="0">
                         <a:latin typeface="Calibri" charset="0"/>
@@ -16695,7 +16695,7 @@
                           <a:ea typeface="Calibri" pitchFamily="34" charset="-122"/>
                           <a:cs typeface="Calibri" pitchFamily="34" charset="-120"/>
                         </a:rPr>
-                        <a:t>0.01%</a:t>
+                        <a:t>0.84%</a:t>
                       </a:r>
                       <a:endParaRPr lang="en-US" sz="500" dirty="0">
                         <a:latin typeface="Calibri" charset="0"/>
@@ -16760,7 +16760,7 @@
                           <a:ea typeface="Calibri" pitchFamily="34" charset="-122"/>
                           <a:cs typeface="Calibri" pitchFamily="34" charset="-120"/>
                         </a:rPr>
-                        <a:t>0.01%</a:t>
+                        <a:t>0.67%</a:t>
                       </a:r>
                       <a:endParaRPr lang="en-US" sz="500" dirty="0">
                         <a:latin typeface="Calibri" charset="0"/>
@@ -16825,7 +16825,7 @@
                           <a:ea typeface="Calibri" pitchFamily="34" charset="-122"/>
                           <a:cs typeface="Calibri" pitchFamily="34" charset="-120"/>
                         </a:rPr>
-                        <a:t>0.01%</a:t>
+                        <a:t>0.63%</a:t>
                       </a:r>
                       <a:endParaRPr lang="en-US" sz="500" dirty="0">
                         <a:latin typeface="Calibri" charset="0"/>
@@ -16890,7 +16890,7 @@
                           <a:ea typeface="Calibri" pitchFamily="34" charset="-122"/>
                           <a:cs typeface="Calibri" pitchFamily="34" charset="-120"/>
                         </a:rPr>
-                        <a:t>0.01%</a:t>
+                        <a:t>0.74%</a:t>
                       </a:r>
                       <a:endParaRPr lang="en-US" sz="500" dirty="0">
                         <a:latin typeface="Calibri" charset="0"/>
@@ -16955,7 +16955,7 @@
                           <a:ea typeface="Calibri" pitchFamily="34" charset="-122"/>
                           <a:cs typeface="Calibri" pitchFamily="34" charset="-120"/>
                         </a:rPr>
-                        <a:t>0.01%</a:t>
+                        <a:t>0.63%</a:t>
                       </a:r>
                       <a:endParaRPr lang="en-US" sz="500" dirty="0">
                         <a:latin typeface="Calibri" charset="0"/>
@@ -17020,7 +17020,7 @@
                           <a:ea typeface="Calibri" pitchFamily="34" charset="-122"/>
                           <a:cs typeface="Calibri" pitchFamily="34" charset="-120"/>
                         </a:rPr>
-                        <a:t>0.01%</a:t>
+                        <a:t>0.60%</a:t>
                       </a:r>
                       <a:endParaRPr lang="en-US" sz="500" dirty="0">
                         <a:latin typeface="Calibri" charset="0"/>
@@ -17085,7 +17085,7 @@
                           <a:ea typeface="Calibri" pitchFamily="34" charset="-122"/>
                           <a:cs typeface="Calibri" pitchFamily="34" charset="-120"/>
                         </a:rPr>
-                        <a:t>0.01%</a:t>
+                        <a:t>0.55%</a:t>
                       </a:r>
                       <a:endParaRPr lang="en-US" sz="500" dirty="0">
                         <a:latin typeface="Calibri" charset="0"/>
@@ -17150,7 +17150,7 @@
                           <a:ea typeface="Calibri" pitchFamily="34" charset="-122"/>
                           <a:cs typeface="Calibri" pitchFamily="34" charset="-120"/>
                         </a:rPr>
-                        <a:t>0.01%</a:t>
+                        <a:t>0.53%</a:t>
                       </a:r>
                       <a:endParaRPr lang="en-US" sz="500" dirty="0">
                         <a:latin typeface="Calibri" charset="0"/>
@@ -17215,7 +17215,7 @@
                           <a:ea typeface="Calibri" pitchFamily="34" charset="-122"/>
                           <a:cs typeface="Calibri" pitchFamily="34" charset="-120"/>
                         </a:rPr>
-                        <a:t>0.01%</a:t>
+                        <a:t>0.51%</a:t>
                       </a:r>
                       <a:endParaRPr lang="en-US" sz="500" dirty="0">
                         <a:latin typeface="Calibri" charset="0"/>
@@ -17280,7 +17280,7 @@
                           <a:ea typeface="Calibri" pitchFamily="34" charset="-122"/>
                           <a:cs typeface="Calibri" pitchFamily="34" charset="-120"/>
                         </a:rPr>
-                        <a:t>0.01%</a:t>
+                        <a:t>0.53%</a:t>
                       </a:r>
                       <a:endParaRPr lang="en-US" sz="500" dirty="0">
                         <a:latin typeface="Calibri" charset="0"/>
@@ -17345,7 +17345,7 @@
                           <a:ea typeface="Calibri" pitchFamily="34" charset="-122"/>
                           <a:cs typeface="Calibri" pitchFamily="34" charset="-120"/>
                         </a:rPr>
-                        <a:t>0.01%</a:t>
+                        <a:t>0.51%</a:t>
                       </a:r>
                       <a:endParaRPr lang="en-US" sz="500" dirty="0">
                         <a:latin typeface="Calibri" charset="0"/>
@@ -17410,7 +17410,7 @@
                           <a:ea typeface="Calibri" pitchFamily="34" charset="-122"/>
                           <a:cs typeface="Calibri" pitchFamily="34" charset="-120"/>
                         </a:rPr>
-                        <a:t>0.00%</a:t>
+                        <a:t>0.44%</a:t>
                       </a:r>
                       <a:endParaRPr lang="en-US" sz="500" dirty="0">
                         <a:latin typeface="Calibri" charset="0"/>
@@ -17475,7 +17475,7 @@
                           <a:ea typeface="Calibri" pitchFamily="34" charset="-122"/>
                           <a:cs typeface="Calibri" pitchFamily="34" charset="-120"/>
                         </a:rPr>
-                        <a:t>0.07%</a:t>
+                        <a:t>7.40%</a:t>
                       </a:r>
                       <a:endParaRPr lang="en-US" sz="500" dirty="0">
                         <a:latin typeface="Calibri" charset="0"/>
@@ -19604,7 +19604,7 @@
                           <a:ea typeface="Calibri" pitchFamily="34" charset="-122"/>
                           <a:cs typeface="Calibri" pitchFamily="34" charset="-120"/>
                         </a:rPr>
-                        <a:t>0.00%</a:t>
+                        <a:t>0.44%</a:t>
                       </a:r>
                       <a:endParaRPr lang="en-US" sz="500" dirty="0">
                         <a:latin typeface="Calibri" charset="0"/>
@@ -19669,7 +19669,7 @@
                           <a:ea typeface="Calibri" pitchFamily="34" charset="-122"/>
                           <a:cs typeface="Calibri" pitchFamily="34" charset="-120"/>
                         </a:rPr>
-                        <a:t>0.00%</a:t>
+                        <a:t>0.46%</a:t>
                       </a:r>
                       <a:endParaRPr lang="en-US" sz="500" dirty="0">
                         <a:latin typeface="Calibri" charset="0"/>
@@ -19734,7 +19734,7 @@
                           <a:ea typeface="Calibri" pitchFamily="34" charset="-122"/>
                           <a:cs typeface="Calibri" pitchFamily="34" charset="-120"/>
                         </a:rPr>
-                        <a:t>0.01%</a:t>
+                        <a:t>0.55%</a:t>
                       </a:r>
                       <a:endParaRPr lang="en-US" sz="500" dirty="0">
                         <a:latin typeface="Calibri" charset="0"/>
@@ -19799,7 +19799,7 @@
                           <a:ea typeface="Calibri" pitchFamily="34" charset="-122"/>
                           <a:cs typeface="Calibri" pitchFamily="34" charset="-120"/>
                         </a:rPr>
-                        <a:t>0.01%</a:t>
+                        <a:t>0.58%</a:t>
                       </a:r>
                       <a:endParaRPr lang="en-US" sz="500" dirty="0">
                         <a:latin typeface="Calibri" charset="0"/>
@@ -19864,7 +19864,7 @@
                           <a:ea typeface="Calibri" pitchFamily="34" charset="-122"/>
                           <a:cs typeface="Calibri" pitchFamily="34" charset="-120"/>
                         </a:rPr>
-                        <a:t>0.01%</a:t>
+                        <a:t>0.58%</a:t>
                       </a:r>
                       <a:endParaRPr lang="en-US" sz="500" dirty="0">
                         <a:latin typeface="Calibri" charset="0"/>
@@ -19929,7 +19929,7 @@
                           <a:ea typeface="Calibri" pitchFamily="34" charset="-122"/>
                           <a:cs typeface="Calibri" pitchFamily="34" charset="-120"/>
                         </a:rPr>
-                        <a:t>0.01%</a:t>
+                        <a:t>0.57%</a:t>
                       </a:r>
                       <a:endParaRPr lang="en-US" sz="500" dirty="0">
                         <a:latin typeface="Calibri" charset="0"/>
@@ -19994,7 +19994,7 @@
                           <a:ea typeface="Calibri" pitchFamily="34" charset="-122"/>
                           <a:cs typeface="Calibri" pitchFamily="34" charset="-120"/>
                         </a:rPr>
-                        <a:t>0.01%</a:t>
+                        <a:t>0.58%</a:t>
                       </a:r>
                       <a:endParaRPr lang="en-US" sz="500" dirty="0">
                         <a:latin typeface="Calibri" charset="0"/>
@@ -20384,7 +20384,7 @@
                           <a:ea typeface="Calibri" pitchFamily="34" charset="-122"/>
                           <a:cs typeface="Calibri" pitchFamily="34" charset="-120"/>
                         </a:rPr>
-                        <a:t>2.92%</a:t>
+                        <a:t>6.82%</a:t>
                       </a:r>
                       <a:endParaRPr lang="en-US" sz="500" dirty="0">
                         <a:latin typeface="Calibri" charset="0"/>

--- a/folletos/2026-04/pptx/FIP_VANTRUST_LIQUIDEZ_RENDIMIENTO.pptx
+++ b/folletos/2026-04/pptx/FIP_VANTRUST_LIQUIDEZ_RENDIMIENTO.pptx
@@ -3113,7 +3113,7 @@
                 <a:ea typeface="Calibri" pitchFamily="34" charset="-122"/>
                 <a:cs typeface="Calibri" pitchFamily="34" charset="-120"/>
               </a:rPr>
-              <a:t>prueba CLP</a:t>
+              <a:t>prueba 13 CLP</a:t>
             </a:r>
             <a:endParaRPr lang="en-US" sz="800" dirty="0"/>
           </a:p>

--- a/folletos/2026-04/pptx/FIP_VANTRUST_LIQUIDEZ_RENDIMIENTO.pptx
+++ b/folletos/2026-04/pptx/FIP_VANTRUST_LIQUIDEZ_RENDIMIENTO.pptx
@@ -3995,7 +3995,7 @@
                 <a:ea typeface="Calibri" pitchFamily="34" charset="-122"/>
                 <a:cs typeface="Calibri" pitchFamily="34" charset="-120"/>
               </a:rPr>
-              <a:t>prueba CLP</a:t>
+              <a:t>prueba 13 CLP</a:t>
             </a:r>
             <a:endParaRPr lang="en-US" sz="800" dirty="0"/>
           </a:p>

--- a/folletos/2026-04/pptx/FIP_VANTRUST_LIQUIDEZ_RENDIMIENTO.pptx
+++ b/folletos/2026-04/pptx/FIP_VANTRUST_LIQUIDEZ_RENDIMIENTO.pptx
@@ -555,7 +555,7 @@
                   <c:v>138.55</c:v>
                 </c:pt>
                 <c:pt idx="58">
-                  <c:v>139.07</c:v>
+                  <c:v>103.31</c:v>
                 </c:pt>
               </c:numCache>
             </c:numRef>
@@ -1443,7 +1443,7 @@
                   <c:v>129.06</c:v>
                 </c:pt>
                 <c:pt idx="58">
-                  <c:v>129.39</c:v>
+                  <c:v/>
                 </c:pt>
               </c:numCache>
             </c:numRef>
@@ -3995,7 +3995,7 @@
                 <a:ea typeface="Calibri" pitchFamily="34" charset="-122"/>
                 <a:cs typeface="Calibri" pitchFamily="34" charset="-120"/>
               </a:rPr>
-              <a:t>prueba 13 CLP</a:t>
+              <a:t>prueba CLP</a:t>
             </a:r>
             <a:endParaRPr lang="en-US" sz="800" dirty="0"/>
           </a:p>
@@ -4644,7 +4644,7 @@
                           <a:ea typeface="Calibri" pitchFamily="34" charset="-122"/>
                           <a:cs typeface="Calibri" pitchFamily="34" charset="-120"/>
                         </a:rPr>
-                        <a:t>0.38%</a:t>
+                        <a:t>-25.44%</a:t>
                       </a:r>
                       <a:endParaRPr lang="en-US" sz="750" dirty="0">
                         <a:latin typeface="Calibri" charset="0"/>
@@ -4712,7 +4712,7 @@
                           <a:ea typeface="Calibri" pitchFamily="34" charset="-122"/>
                           <a:cs typeface="Calibri" pitchFamily="34" charset="-120"/>
                         </a:rPr>
-                        <a:t>1.13%</a:t>
+                        <a:t>-24.88%</a:t>
                       </a:r>
                       <a:endParaRPr lang="en-US" sz="750" dirty="0">
                         <a:latin typeface="Calibri" charset="0"/>
@@ -4780,7 +4780,7 @@
                           <a:ea typeface="Calibri" pitchFamily="34" charset="-122"/>
                           <a:cs typeface="Calibri" pitchFamily="34" charset="-120"/>
                         </a:rPr>
-                        <a:t>2.33%</a:t>
+                        <a:t>-23.98%</a:t>
                       </a:r>
                       <a:endParaRPr lang="en-US" sz="750" dirty="0">
                         <a:latin typeface="Calibri" charset="0"/>
@@ -4848,7 +4848,7 @@
                           <a:ea typeface="Calibri" pitchFamily="34" charset="-122"/>
                           <a:cs typeface="Calibri" pitchFamily="34" charset="-120"/>
                         </a:rPr>
-                        <a:t>4.90%</a:t>
+                        <a:t>-22.07%</a:t>
                       </a:r>
                       <a:endParaRPr lang="en-US" sz="750" dirty="0">
                         <a:latin typeface="Calibri" charset="0"/>
@@ -4916,7 +4916,7 @@
                           <a:ea typeface="Calibri" pitchFamily="34" charset="-122"/>
                           <a:cs typeface="Calibri" pitchFamily="34" charset="-120"/>
                         </a:rPr>
-                        <a:t>3.39%</a:t>
+                        <a:t>-74.63%</a:t>
                       </a:r>
                       <a:endParaRPr lang="en-US" sz="750" dirty="0">
                         <a:latin typeface="Calibri" charset="0"/>
@@ -5054,7 +5054,7 @@
                           <a:ea typeface="Calibri" pitchFamily="34" charset="-122"/>
                           <a:cs typeface="Calibri" pitchFamily="34" charset="-120"/>
                         </a:rPr>
-                        <a:t>0.26%</a:t>
+                        <a:t>-100.00%</a:t>
                       </a:r>
                       <a:endParaRPr lang="en-US" sz="750" dirty="0">
                         <a:latin typeface="Calibri" charset="0"/>
@@ -5122,7 +5122,7 @@
                           <a:ea typeface="Calibri" pitchFamily="34" charset="-122"/>
                           <a:cs typeface="Calibri" pitchFamily="34" charset="-120"/>
                         </a:rPr>
-                        <a:t>0.77%</a:t>
+                        <a:t>-100.00%</a:t>
                       </a:r>
                       <a:endParaRPr lang="en-US" sz="750" dirty="0">
                         <a:latin typeface="Calibri" charset="0"/>
@@ -5190,7 +5190,7 @@
                           <a:ea typeface="Calibri" pitchFamily="34" charset="-122"/>
                           <a:cs typeface="Calibri" pitchFamily="34" charset="-120"/>
                         </a:rPr>
-                        <a:t>1.62%</a:t>
+                        <a:t>-100.00%</a:t>
                       </a:r>
                       <a:endParaRPr lang="en-US" sz="750" dirty="0">
                         <a:latin typeface="Calibri" charset="0"/>
@@ -5258,7 +5258,7 @@
                           <a:ea typeface="Calibri" pitchFamily="34" charset="-122"/>
                           <a:cs typeface="Calibri" pitchFamily="34" charset="-120"/>
                         </a:rPr>
-                        <a:t>3.43%</a:t>
+                        <a:t>-100.00%</a:t>
                       </a:r>
                       <a:endParaRPr lang="en-US" sz="750" dirty="0">
                         <a:latin typeface="Calibri" charset="0"/>
@@ -5326,7 +5326,7 @@
                           <a:ea typeface="Calibri" pitchFamily="34" charset="-122"/>
                           <a:cs typeface="Calibri" pitchFamily="34" charset="-120"/>
                         </a:rPr>
-                        <a:t>2.32%</a:t>
+                        <a:t>-300.00%</a:t>
                       </a:r>
                       <a:endParaRPr lang="en-US" sz="750" dirty="0">
                         <a:latin typeface="Calibri" charset="0"/>
@@ -21581,7 +21581,7 @@
                           <a:ea typeface="Calibri" pitchFamily="34" charset="-122"/>
                           <a:cs typeface="Calibri" pitchFamily="34" charset="-120"/>
                         </a:rPr>
-                        <a:t>0.38%</a:t>
+                        <a:t>-25.44%</a:t>
                       </a:r>
                       <a:endParaRPr lang="en-US" sz="500" dirty="0">
                         <a:latin typeface="Calibri" charset="0"/>
@@ -22078,7 +22078,7 @@
                           <a:ea typeface="Calibri" pitchFamily="34" charset="-122"/>
                           <a:cs typeface="Calibri" pitchFamily="34" charset="-120"/>
                         </a:rPr>
-                        <a:t>3.39%</a:t>
+                        <a:t>-74.63%</a:t>
                       </a:r>
                       <a:endParaRPr lang="en-US" sz="500" dirty="0">
                         <a:latin typeface="Calibri" charset="0"/>
@@ -22459,7 +22459,7 @@
                           <a:ea typeface="Calibri" pitchFamily="34" charset="-122"/>
                           <a:cs typeface="Calibri" pitchFamily="34" charset="-120"/>
                         </a:rPr>
-                        <a:t>0.26%</a:t>
+                        <a:t>-100.00%</a:t>
                       </a:r>
                       <a:endParaRPr lang="en-US" sz="500" dirty="0">
                         <a:latin typeface="Calibri" charset="0"/>
@@ -22956,7 +22956,7 @@
                           <a:ea typeface="Calibri" pitchFamily="34" charset="-122"/>
                           <a:cs typeface="Calibri" pitchFamily="34" charset="-120"/>
                         </a:rPr>
-                        <a:t>2.32%</a:t>
+                        <a:t>-300.00%</a:t>
                       </a:r>
                       <a:endParaRPr lang="en-US" sz="500" dirty="0">
                         <a:latin typeface="Calibri" charset="0"/>

--- a/folletos/2026-04/pptx/FIP_VANTRUST_LIQUIDEZ_RENDIMIENTO.pptx
+++ b/folletos/2026-04/pptx/FIP_VANTRUST_LIQUIDEZ_RENDIMIENTO.pptx
@@ -3995,7 +3995,7 @@
                 <a:ea typeface="Calibri" pitchFamily="34" charset="-122"/>
                 <a:cs typeface="Calibri" pitchFamily="34" charset="-120"/>
               </a:rPr>
-              <a:t>prueba CLP</a:t>
+              <a:t>prueba 14 CLP</a:t>
             </a:r>
             <a:endParaRPr lang="en-US" sz="800" dirty="0"/>
           </a:p>
